--- a/docs/customer-documents/orgcomp-series/Vol_IX_Book_00_OrgComp_Day2_Operations_Overview.pptx
+++ b/docs/customer-documents/orgcomp-series/Vol_IX_Book_00_OrgComp_Day2_Operations_Overview.pptx
@@ -512,7 +512,7 @@
           <a:p/>
           <a:p>
             <a:r>
-              <a:t>Vendor sources: host repo: docs/customer-documents/federal-aan-series/servicenow-day2/</a:t>
+              <a:t>Vendor sources: host repo: docs/customer-documents/orgcomp-series/servicenow-day2/</a:t>
             </a:r>
           </a:p>
         </p:txBody>
@@ -4563,7 +4563,7 @@
                 </a:solidFill>
                 <a:latin typeface="Arial"/>
               </a:rPr>
-              <a:t>Date Code: 2026-07-12 15:00 ET</a:t>
+              <a:t>Date Code: 2026-07-19 12:10 ET</a:t>
             </a:r>
           </a:p>
         </p:txBody>
@@ -4751,7 +4751,7 @@
                 </a:solidFill>
                 <a:latin typeface="Arial"/>
               </a:rPr>
-              <a:t>ServiceNow Day-2 Operations · Date Code: 2026-07-12 15:00 ET</a:t>
+              <a:t>ServiceNow Day-2 Operations · Date Code: 2026-07-19 12:10 ET</a:t>
             </a:r>
           </a:p>
         </p:txBody>
@@ -4974,7 +4974,7 @@
                 </a:solidFill>
                 <a:latin typeface="Arial"/>
               </a:rPr>
-              <a:t>ServiceNow Day-2 Operations · Date Code: 2026-07-12 15:00 ET</a:t>
+              <a:t>ServiceNow Day-2 Operations · Date Code: 2026-07-19 12:10 ET</a:t>
             </a:r>
           </a:p>
         </p:txBody>
@@ -5846,7 +5846,7 @@
                 </a:solidFill>
                 <a:latin typeface="Arial"/>
               </a:rPr>
-              <a:t>Five books across the day-2 surface</a:t>
+              <a:t>Six books across the day-2 surface</a:t>
             </a:r>
           </a:p>
         </p:txBody>
@@ -5881,7 +5881,7 @@
                 </a:solidFill>
                 <a:latin typeface="Arial"/>
               </a:rPr>
-              <a:t>ServiceNow Day-2 Operations · Date Code: 2026-07-12 15:00 ET</a:t>
+              <a:t>ServiceNow Day-2 Operations · Date Code: 2026-07-19 12:10 ET</a:t>
             </a:r>
           </a:p>
         </p:txBody>
@@ -5944,7 +5944,7 @@
                 <a:gridCol w="2743200"/>
                 <a:gridCol w="2743200"/>
               </a:tblGrid>
-              <a:tr h="457200">
+              <a:tr h="391885">
                 <a:tc>
                   <a:txBody>
                     <a:bodyPr/>
@@ -6012,7 +6012,7 @@
                   </a:tcPr>
                 </a:tc>
               </a:tr>
-              <a:tr h="457200">
+              <a:tr h="391885">
                 <a:tc>
                   <a:txBody>
                     <a:bodyPr/>
@@ -6080,7 +6080,7 @@
                   </a:tcPr>
                 </a:tc>
               </a:tr>
-              <a:tr h="457200">
+              <a:tr h="391885">
                 <a:tc>
                   <a:txBody>
                     <a:bodyPr/>
@@ -6148,7 +6148,7 @@
                   </a:tcPr>
                 </a:tc>
               </a:tr>
-              <a:tr h="457200">
+              <a:tr h="391885">
                 <a:tc>
                   <a:txBody>
                     <a:bodyPr/>
@@ -6216,7 +6216,7 @@
                   </a:tcPr>
                 </a:tc>
               </a:tr>
-              <a:tr h="457200">
+              <a:tr h="391885">
                 <a:tc>
                   <a:txBody>
                     <a:bodyPr/>
@@ -6284,7 +6284,7 @@
                   </a:tcPr>
                 </a:tc>
               </a:tr>
-              <a:tr h="457200">
+              <a:tr h="391885">
                 <a:tc>
                   <a:txBody>
                     <a:bodyPr/>
@@ -6352,6 +6352,74 @@
                   </a:tcPr>
                 </a:tc>
               </a:tr>
+              <a:tr h="391890">
+                <a:tc>
+                  <a:txBody>
+                    <a:bodyPr/>
+                    <a:lstStyle/>
+                    <a:p>
+                      <a:r>
+                        <a:rPr sz="900" b="1">
+                          <a:solidFill>
+                            <a:srgbClr val="1F3A5F"/>
+                          </a:solidFill>
+                          <a:latin typeface="Arial"/>
+                        </a:rPr>
+                        <a:t>IX-06</a:t>
+                      </a:r>
+                    </a:p>
+                  </a:txBody>
+                  <a:tcPr anchor="ctr">
+                    <a:solidFill>
+                      <a:srgbClr val="E6F5F2"/>
+                    </a:solidFill>
+                  </a:tcPr>
+                </a:tc>
+                <a:tc>
+                  <a:txBody>
+                    <a:bodyPr/>
+                    <a:lstStyle/>
+                    <a:p>
+                      <a:r>
+                        <a:rPr sz="900">
+                          <a:solidFill>
+                            <a:srgbClr val="1E293B"/>
+                          </a:solidFill>
+                          <a:latin typeface="Arial"/>
+                        </a:rPr>
+                        <a:t>Identity &amp; Access Governance — event-driven JML, certification campaigns, IAM evidence (gated)</a:t>
+                      </a:r>
+                    </a:p>
+                  </a:txBody>
+                  <a:tcPr anchor="ctr">
+                    <a:solidFill>
+                      <a:srgbClr val="E6F5F2"/>
+                    </a:solidFill>
+                  </a:tcPr>
+                </a:tc>
+                <a:tc>
+                  <a:txBody>
+                    <a:bodyPr/>
+                    <a:lstStyle/>
+                    <a:p>
+                      <a:r>
+                        <a:rPr sz="900">
+                          <a:solidFill>
+                            <a:srgbClr val="1E293B"/>
+                          </a:solidFill>
+                          <a:latin typeface="Arial"/>
+                        </a:rPr>
+                        <a:t>Phase 2 · #1221</a:t>
+                      </a:r>
+                    </a:p>
+                  </a:txBody>
+                  <a:tcPr anchor="ctr">
+                    <a:solidFill>
+                      <a:srgbClr val="E6F5F2"/>
+                    </a:solidFill>
+                  </a:tcPr>
+                </a:tc>
+              </a:tr>
             </a:tbl>
           </a:graphicData>
         </a:graphic>
@@ -6539,7 +6607,7 @@
                 </a:solidFill>
                 <a:latin typeface="Arial"/>
               </a:rPr>
-              <a:t>ServiceNow Day-2 Operations · Date Code: 2026-07-12 15:00 ET</a:t>
+              <a:t>ServiceNow Day-2 Operations · Date Code: 2026-07-19 12:10 ET</a:t>
             </a:r>
           </a:p>
         </p:txBody>

--- a/docs/customer-documents/orgcomp-series/Vol_IX_Book_00_OrgComp_Day2_Operations_Overview.pptx
+++ b/docs/customer-documents/orgcomp-series/Vol_IX_Book_00_OrgComp_Day2_Operations_Overview.pptx
@@ -4563,7 +4563,7 @@
                 </a:solidFill>
                 <a:latin typeface="Arial"/>
               </a:rPr>
-              <a:t>Date Code: 2026-07-19 12:10 ET</a:t>
+              <a:t>Date Code: 2026-07-19 16:20 ET</a:t>
             </a:r>
           </a:p>
         </p:txBody>
@@ -4751,7 +4751,7 @@
                 </a:solidFill>
                 <a:latin typeface="Arial"/>
               </a:rPr>
-              <a:t>ServiceNow Day-2 Operations · Date Code: 2026-07-19 12:10 ET</a:t>
+              <a:t>ServiceNow Day-2 Operations · Date Code: 2026-07-19 16:20 ET</a:t>
             </a:r>
           </a:p>
         </p:txBody>
@@ -4974,7 +4974,7 @@
                 </a:solidFill>
                 <a:latin typeface="Arial"/>
               </a:rPr>
-              <a:t>ServiceNow Day-2 Operations · Date Code: 2026-07-19 12:10 ET</a:t>
+              <a:t>ServiceNow Day-2 Operations · Date Code: 2026-07-19 16:20 ET</a:t>
             </a:r>
           </a:p>
         </p:txBody>
@@ -5881,7 +5881,7 @@
                 </a:solidFill>
                 <a:latin typeface="Arial"/>
               </a:rPr>
-              <a:t>ServiceNow Day-2 Operations · Date Code: 2026-07-19 12:10 ET</a:t>
+              <a:t>ServiceNow Day-2 Operations · Date Code: 2026-07-19 16:20 ET</a:t>
             </a:r>
           </a:p>
         </p:txBody>
@@ -6607,7 +6607,7 @@
                 </a:solidFill>
                 <a:latin typeface="Arial"/>
               </a:rPr>
-              <a:t>ServiceNow Day-2 Operations · Date Code: 2026-07-19 12:10 ET</a:t>
+              <a:t>ServiceNow Day-2 Operations · Date Code: 2026-07-19 16:20 ET</a:t>
             </a:r>
           </a:p>
         </p:txBody>

--- a/docs/customer-documents/orgcomp-series/Vol_IX_Book_00_OrgComp_Day2_Operations_Overview.pptx
+++ b/docs/customer-documents/orgcomp-series/Vol_IX_Book_00_OrgComp_Day2_Operations_Overview.pptx
@@ -4563,7 +4563,7 @@
                 </a:solidFill>
                 <a:latin typeface="Arial"/>
               </a:rPr>
-              <a:t>Date Code: 2026-07-19 16:20 ET</a:t>
+              <a:t>Date Code: 2026-07-19 17:05 ET</a:t>
             </a:r>
           </a:p>
         </p:txBody>
@@ -4751,7 +4751,7 @@
                 </a:solidFill>
                 <a:latin typeface="Arial"/>
               </a:rPr>
-              <a:t>ServiceNow Day-2 Operations · Date Code: 2026-07-19 16:20 ET</a:t>
+              <a:t>ServiceNow Day-2 Operations · Date Code: 2026-07-19 17:05 ET</a:t>
             </a:r>
           </a:p>
         </p:txBody>
@@ -4974,7 +4974,7 @@
                 </a:solidFill>
                 <a:latin typeface="Arial"/>
               </a:rPr>
-              <a:t>ServiceNow Day-2 Operations · Date Code: 2026-07-19 16:20 ET</a:t>
+              <a:t>ServiceNow Day-2 Operations · Date Code: 2026-07-19 17:05 ET</a:t>
             </a:r>
           </a:p>
         </p:txBody>
@@ -5881,7 +5881,7 @@
                 </a:solidFill>
                 <a:latin typeface="Arial"/>
               </a:rPr>
-              <a:t>ServiceNow Day-2 Operations · Date Code: 2026-07-19 16:20 ET</a:t>
+              <a:t>ServiceNow Day-2 Operations · Date Code: 2026-07-19 17:05 ET</a:t>
             </a:r>
           </a:p>
         </p:txBody>
@@ -6607,7 +6607,7 @@
                 </a:solidFill>
                 <a:latin typeface="Arial"/>
               </a:rPr>
-              <a:t>ServiceNow Day-2 Operations · Date Code: 2026-07-19 16:20 ET</a:t>
+              <a:t>ServiceNow Day-2 Operations · Date Code: 2026-07-19 17:05 ET</a:t>
             </a:r>
           </a:p>
         </p:txBody>
